--- a/curso/pptx/S78.pptx
+++ b/curso/pptx/S78.pptx
@@ -3821,7 +3821,7 @@
                 </a:solidFill>
                 <a:latin typeface="Fredoka"/>
               </a:rPr>
-              <a:t>Caso 1 · Tres amigos de Chen</a:t>
+              <a:t>Caso 1 · Tres amistades distintas</a:t>
             </a:r>
           </a:p>
         </p:txBody>
@@ -3903,7 +3903,7 @@
                 </a:solidFill>
                 <a:latin typeface="Nunito Sans"/>
               </a:rPr>
-              <a:t>Chen se sienta con Dylan porque Dylan le deja los apuntes. Con Omar juega al Fortnite. Con Naiara habla de todo desde primaria. (Ejemplo inventado.)</a:t>
+              <a:t>Un chico se sienta con un compañero porque le deja los apuntes. Con otro juega al Fortnite. Con una amiga habla de todo desde primaria. (Ejemplo inventado.)</a:t>
             </a:r>
           </a:p>
         </p:txBody>
@@ -3951,7 +3951,7 @@
                 </a:solidFill>
                 <a:latin typeface="Nunito Sans"/>
               </a:rPr>
-              <a:t>Dylan: le sirve para los apuntes. Amistad por </a:t>
+              <a:t>El primero: le sirve para los apuntes. Amistad por </a:t>
             </a:r>
             <a:r>
               <a:rPr sz="2400" b="1">
@@ -3994,7 +3994,7 @@
                 </a:solidFill>
                 <a:latin typeface="Nunito Sans"/>
               </a:rPr>
-              <a:t>Omar: lo pasan bien jugando. Amistad por </a:t>
+              <a:t>El segundo: lo pasan bien jugando. Amistad por </a:t>
             </a:r>
             <a:r>
               <a:rPr sz="2400" b="1">
@@ -4037,7 +4037,7 @@
                 </a:solidFill>
                 <a:latin typeface="Nunito Sans"/>
               </a:rPr>
-              <a:t>Naiara: se quieren por cómo son, desde hace años. Se parece a la amistad por </a:t>
+              <a:t>La amiga: se quieren por cómo son, desde hace años. Se parece a la amistad por </a:t>
             </a:r>
             <a:r>
               <a:rPr sz="2400" b="1">
@@ -4266,7 +4266,7 @@
                 </a:solidFill>
                 <a:latin typeface="Nunito Sans"/>
               </a:rPr>
-              <a:t>En el grupo de WhatsApp, la cuadrilla de Leire se ríe de una chica nueva. Leire no quiere, pero piensa: «Si no me río, me dejan fuera». (Ejemplo inventado.)</a:t>
+              <a:t>La cuadrilla de una chica se ríe en el grupo de un árbitro que se equivocó. Ella no quiere, pero piensa: «Si no me río, me dejan fuera». (Ejemplo inventado.)</a:t>
             </a:r>
           </a:p>
         </p:txBody>
@@ -4611,7 +4611,7 @@
                 </a:solidFill>
                 <a:latin typeface="Nunito Sans"/>
               </a:rPr>
-              <a:t>Iker quiere que Aitor le diga a su madre que ayer estudiaron juntos. En realidad, Iker se fue al Casco Viejo. «Si eres mi amigo, me cubres». (Ejemplo inventado.)</a:t>
+              <a:t>Un chico quiere que un amigo le diga a su madre que ayer estudiaron juntos. En realidad, se fue al Casco Viejo. «Si eres mi amigo, me cubres». (Ejemplo inventado.)</a:t>
             </a:r>
           </a:p>
         </p:txBody>
@@ -4659,7 +4659,7 @@
                 </a:solidFill>
                 <a:latin typeface="Nunito Sans"/>
               </a:rPr>
-              <a:t>Si Aitor dice que no, ¿es un mal amigo?</a:t>
+              <a:t>Si el amigo dice que no, ¿es un mal amigo?</a:t>
             </a:r>
           </a:p>
           <a:p>
@@ -6337,7 +6337,7 @@
                 </a:solidFill>
                 <a:latin typeface="Nunito Sans"/>
               </a:rPr>
-              <a:t>Iker tiene 600 seguidores en Instagram y un grupo de WhatsApp con 30 personas de la cuadrilla.</a:t>
+              <a:t>Un chico tiene 600 seguidores en Instagram y un grupo de WhatsApp con 30 personas de la cuadrilla.</a:t>
             </a:r>
           </a:p>
         </p:txBody>

--- a/curso/pptx/S78.pptx
+++ b/curso/pptx/S78.pptx
@@ -22,6 +22,7 @@
     <p:sldId id="270" r:id="rId22"/>
     <p:sldId id="271" r:id="rId23"/>
     <p:sldId id="272" r:id="rId24"/>
+    <p:sldId id="273" r:id="rId25"/>
   </p:sldIdLst>
   <p:sldSz cx="12192000" cy="6858000" type="screen4x3"/>
   <p:notesSz cx="6858000" cy="9144000"/>
@@ -3535,7 +3536,7 @@
                 </a:solidFill>
                 <a:latin typeface="Nunito Sans"/>
               </a:rPr>
-              <a:t>PENSAMIENTO CRÍTICO · SESIÓN 78 · UNIDAD 17 · AMISTAD, AMOR Y FAMILIAS</a:t>
+              <a:t>PENSAMIENTO CRÍTICO · SESIÓN 78 · UNIDAD 17 · DIFERENTES, PERO IGUALES</a:t>
             </a:r>
           </a:p>
         </p:txBody>
@@ -3574,7 +3575,7 @@
                 </a:solidFill>
                 <a:latin typeface="Fredoka"/>
               </a:rPr>
-              <a:t>¿Qué es un amigo?</a:t>
+              <a:t>Sexo y género</a:t>
             </a:r>
           </a:p>
         </p:txBody>
@@ -3613,7 +3614,7 @@
                 </a:solidFill>
                 <a:latin typeface="Nunito Sans"/>
               </a:rPr>
-              <a:t>Aristóteles distingue amistades por utilidad, por placer y por virtud; un buen amigo quiere tu bien, aunque a veces eso sea decir que no.</a:t>
+              <a:t>Solemos distinguir el sexo, que es biológico, del género: los roles y expectativas que cada sociedad asocia a ser hombre o mujer.</a:t>
             </a:r>
           </a:p>
         </p:txBody>
@@ -3717,7 +3718,7 @@
                 </a:solidFill>
                 <a:latin typeface="Fredoka"/>
               </a:rPr>
-              <a:t>Casos resueltos</a:t>
+              <a:t>Estereotipos de género</a:t>
             </a:r>
           </a:p>
         </p:txBody>
@@ -3782,7 +3783,7 @@
                 </a:solidFill>
                 <a:latin typeface="Nunito Sans"/>
               </a:rPr>
-              <a:t>BLOQUE 2 · CASOS RESUELTOS</a:t>
+              <a:t>BLOQUE 2 · ESTEREOTIPOS DE GÉNERO</a:t>
             </a:r>
           </a:p>
         </p:txBody>
@@ -3821,7 +3822,7 @@
                 </a:solidFill>
                 <a:latin typeface="Fredoka"/>
               </a:rPr>
-              <a:t>Caso 1 · Tres amistades distintas</a:t>
+              <a:t>Estereotipo de género</a:t>
             </a:r>
           </a:p>
         </p:txBody>
@@ -3834,14 +3835,14 @@
         </p:nvSpPr>
         <p:spPr>
           <a:xfrm>
-            <a:off x="640000" y="1600000"/>
-            <a:ext cx="10912000" cy="1100000"/>
+            <a:off x="640000" y="1650000"/>
+            <a:ext cx="10912000" cy="1150000"/>
           </a:xfrm>
           <a:prstGeom prst="rect">
             <a:avLst/>
           </a:prstGeom>
           <a:solidFill>
-            <a:srgbClr val="FFFFFF"/>
+            <a:srgbClr val="EAF0F7"/>
           </a:solidFill>
           <a:ln>
             <a:noFill/>
@@ -3877,7 +3878,7 @@
         </p:nvSpPr>
         <p:spPr>
           <a:xfrm>
-            <a:off x="840000" y="1650000"/>
+            <a:off x="840000" y="1730000"/>
             <a:ext cx="10512000" cy="1000000"/>
           </a:xfrm>
           <a:prstGeom prst="rect">
@@ -3893,17 +3894,17 @@
           <a:p>
             <a:pPr>
               <a:spcAft>
-                <a:spcPts val="1170"/>
-              </a:spcAft>
-            </a:pPr>
-            <a:r>
-              <a:rPr sz="2600" b="1">
+                <a:spcPts val="1260"/>
+              </a:spcAft>
+            </a:pPr>
+            <a:r>
+              <a:rPr sz="2800" b="1">
                 <a:solidFill>
                   <a:srgbClr val="1F2A44"/>
                 </a:solidFill>
                 <a:latin typeface="Nunito Sans"/>
               </a:rPr>
-              <a:t>Un chico se sienta con un compañero porque le deja los apuntes. Con otro juega al Fortnite. Con una amiga habla de todo desde primaria. (Ejemplo inventado.)</a:t>
+              <a:t>Un estereotipo de género es una idea fija y simplificada sobre cómo son o deben ser hombres o mujeres.</a:t>
             </a:r>
           </a:p>
         </p:txBody>
@@ -3916,8 +3917,8 @@
         </p:nvSpPr>
         <p:spPr>
           <a:xfrm>
-            <a:off x="640000" y="2900000"/>
-            <a:ext cx="10912000" cy="3500000"/>
+            <a:off x="640000" y="3000000"/>
+            <a:ext cx="10912000" cy="3458000"/>
           </a:xfrm>
           <a:prstGeom prst="rect">
             <a:avLst/>
@@ -3932,155 +3933,130 @@
           <a:p>
             <a:pPr>
               <a:spcAft>
-                <a:spcPts val="1080"/>
-              </a:spcAft>
-            </a:pPr>
-            <a:r>
-              <a:rPr sz="2400" b="1">
+                <a:spcPts val="1260"/>
+              </a:spcAft>
+            </a:pPr>
+            <a:r>
+              <a:rPr sz="2800" b="1">
                 <a:solidFill>
                   <a:srgbClr val="E8793A"/>
                 </a:solidFill>
                 <a:latin typeface="Nunito Sans"/>
               </a:rPr>
-              <a:t>1. </a:t>
-            </a:r>
-            <a:r>
-              <a:rPr sz="2400" b="0">
+              <a:t>• </a:t>
+            </a:r>
+            <a:r>
+              <a:rPr sz="2800" b="0">
                 <a:solidFill>
                   <a:srgbClr val="1F2A44"/>
                 </a:solidFill>
                 <a:latin typeface="Nunito Sans"/>
               </a:rPr>
-              <a:t>El primero: le sirve para los apuntes. Amistad por </a:t>
-            </a:r>
-            <a:r>
-              <a:rPr sz="2400" b="1">
+              <a:t>Nace de </a:t>
+            </a:r>
+            <a:r>
+              <a:rPr sz="2800" b="1">
                 <a:solidFill>
                   <a:srgbClr val="1F2A44"/>
                 </a:solidFill>
                 <a:latin typeface="Nunito Sans"/>
               </a:rPr>
-              <a:t>utilidad</a:t>
-            </a:r>
-            <a:r>
-              <a:rPr sz="2400" b="0">
+              <a:t>generalizar</a:t>
+            </a:r>
+            <a:r>
+              <a:rPr sz="2800" b="0">
                 <a:solidFill>
                   <a:srgbClr val="1F2A44"/>
                 </a:solidFill>
                 <a:latin typeface="Nunito Sans"/>
               </a:rPr>
-              <a:t>.</a:t>
-            </a:r>
-          </a:p>
-          <a:p>
-            <a:pPr>
-              <a:spcAft>
-                <a:spcPts val="1080"/>
-              </a:spcAft>
-            </a:pPr>
-            <a:r>
-              <a:rPr sz="2400" b="1">
+              <a:t> deprisa, como vimos en la sesión 25</a:t>
+            </a:r>
+          </a:p>
+          <a:p>
+            <a:pPr>
+              <a:spcAft>
+                <a:spcPts val="1260"/>
+              </a:spcAft>
+            </a:pPr>
+            <a:r>
+              <a:rPr sz="2800" b="1">
                 <a:solidFill>
                   <a:srgbClr val="E8793A"/>
                 </a:solidFill>
                 <a:latin typeface="Nunito Sans"/>
               </a:rPr>
-              <a:t>2. </a:t>
-            </a:r>
-            <a:r>
-              <a:rPr sz="2400" b="0">
+              <a:t>• </a:t>
+            </a:r>
+            <a:r>
+              <a:rPr sz="2800" b="0">
                 <a:solidFill>
                   <a:srgbClr val="1F2A44"/>
                 </a:solidFill>
                 <a:latin typeface="Nunito Sans"/>
               </a:rPr>
-              <a:t>El segundo: lo pasan bien jugando. Amistad por </a:t>
-            </a:r>
-            <a:r>
-              <a:rPr sz="2400" b="1">
+              <a:t>Se parece al </a:t>
+            </a:r>
+            <a:r>
+              <a:rPr sz="2800" b="1">
                 <a:solidFill>
                   <a:srgbClr val="1F2A44"/>
                 </a:solidFill>
                 <a:latin typeface="Nunito Sans"/>
               </a:rPr>
-              <a:t>placer</a:t>
-            </a:r>
-            <a:r>
-              <a:rPr sz="2400" b="0">
+              <a:t>efecto halo</a:t>
+            </a:r>
+            <a:r>
+              <a:rPr sz="2800" b="0">
                 <a:solidFill>
                   <a:srgbClr val="1F2A44"/>
                 </a:solidFill>
                 <a:latin typeface="Nunito Sans"/>
               </a:rPr>
-              <a:t>.</a:t>
-            </a:r>
-          </a:p>
-          <a:p>
-            <a:pPr>
-              <a:spcAft>
-                <a:spcPts val="1080"/>
-              </a:spcAft>
-            </a:pPr>
-            <a:r>
-              <a:rPr sz="2400" b="1">
+              <a:t> (sesión 46): un rasgo decide todo</a:t>
+            </a:r>
+          </a:p>
+          <a:p>
+            <a:pPr>
+              <a:spcAft>
+                <a:spcPts val="1260"/>
+              </a:spcAft>
+            </a:pPr>
+            <a:r>
+              <a:rPr sz="2800" b="1">
                 <a:solidFill>
                   <a:srgbClr val="E8793A"/>
                 </a:solidFill>
                 <a:latin typeface="Nunito Sans"/>
               </a:rPr>
-              <a:t>3. </a:t>
-            </a:r>
-            <a:r>
-              <a:rPr sz="2400" b="0">
+              <a:t>• </a:t>
+            </a:r>
+            <a:r>
+              <a:rPr sz="2800" b="0">
                 <a:solidFill>
                   <a:srgbClr val="1F2A44"/>
                 </a:solidFill>
                 <a:latin typeface="Nunito Sans"/>
               </a:rPr>
-              <a:t>La amiga: se quieren por cómo son, desde hace años. Se parece a la amistad por </a:t>
-            </a:r>
-            <a:r>
-              <a:rPr sz="2400" b="1">
+              <a:t>Pregunta que lo desmonta: «¿</a:t>
+            </a:r>
+            <a:r>
+              <a:rPr sz="2800" b="1">
                 <a:solidFill>
                   <a:srgbClr val="1F2A44"/>
                 </a:solidFill>
                 <a:latin typeface="Nunito Sans"/>
               </a:rPr>
-              <a:t>virtud</a:t>
-            </a:r>
-            <a:r>
-              <a:rPr sz="2400" b="0">
+              <a:t>cómo lo sabes</a:t>
+            </a:r>
+            <a:r>
+              <a:rPr sz="2800" b="0">
                 <a:solidFill>
                   <a:srgbClr val="1F2A44"/>
                 </a:solidFill>
                 <a:latin typeface="Nunito Sans"/>
               </a:rPr>
-              <a:t>.</a:t>
-            </a:r>
-          </a:p>
-          <a:p>
-            <a:pPr>
-              <a:spcAft>
-                <a:spcPts val="1080"/>
-              </a:spcAft>
-            </a:pPr>
-            <a:r>
-              <a:rPr sz="2400" b="1">
-                <a:solidFill>
-                  <a:srgbClr val="E8793A"/>
-                </a:solidFill>
-                <a:latin typeface="Nunito Sans"/>
-              </a:rPr>
-              <a:t>4. </a:t>
-            </a:r>
-            <a:r>
-              <a:rPr sz="2400" b="0">
-                <a:solidFill>
-                  <a:srgbClr val="1F2A44"/>
-                </a:solidFill>
-                <a:latin typeface="Nunito Sans"/>
-              </a:rPr>
-              <a:t>Conclusión: las tres son amistades. Pero si se acaban los apuntes o el juego, puede acabarse la amistad.</a:t>
+              <a:t>? ¿Todas? ¿Todos?»</a:t>
             </a:r>
           </a:p>
         </p:txBody>
@@ -4145,7 +4121,7 @@
                 </a:solidFill>
                 <a:latin typeface="Nunito Sans"/>
               </a:rPr>
-              <a:t>BLOQUE 2 · CASOS RESUELTOS</a:t>
+              <a:t>BLOQUE 2 · ESTEREOTIPOS DE GÉNERO</a:t>
             </a:r>
           </a:p>
         </p:txBody>
@@ -4184,7 +4160,7 @@
                 </a:solidFill>
                 <a:latin typeface="Fredoka"/>
               </a:rPr>
-              <a:t>Caso 2 · La presión del grupo</a:t>
+              <a:t>Caso 1 · El equipo de robótica</a:t>
             </a:r>
           </a:p>
         </p:txBody>
@@ -4266,7 +4242,7 @@
                 </a:solidFill>
                 <a:latin typeface="Nunito Sans"/>
               </a:rPr>
-              <a:t>La cuadrilla de una chica se ríe en el grupo de un árbitro que se equivocó. Ella no quiere, pero piensa: «Si no me río, me dejan fuera». (Ejemplo inventado.)</a:t>
+              <a:t>Un chico ve la lista del equipo de robótica del instituto y dice: «¿Una chica? Las chicas no valen para la tecnología».</a:t>
             </a:r>
           </a:p>
         </p:txBody>
@@ -4314,7 +4290,7 @@
                 </a:solidFill>
                 <a:latin typeface="Nunito Sans"/>
               </a:rPr>
-              <a:t>Es </a:t>
+              <a:t>¿Qué dice? Que </a:t>
             </a:r>
             <a:r>
               <a:rPr sz="2400" b="1">
@@ -4323,7 +4299,7 @@
                 </a:solidFill>
                 <a:latin typeface="Nunito Sans"/>
               </a:rPr>
-              <a:t>presión del grupo</a:t>
+              <a:t>todas</a:t>
             </a:r>
             <a:r>
               <a:rPr sz="2400" b="0">
@@ -4332,7 +4308,7 @@
                 </a:solidFill>
                 <a:latin typeface="Nunito Sans"/>
               </a:rPr>
-              <a:t>: hacer algo para no quedarte fuera, como en el experimento de Asch (sesión 29).</a:t>
+              <a:t> las chicas son malas en tecnología.</a:t>
             </a:r>
           </a:p>
           <a:p>
@@ -4357,7 +4333,7 @@
                 </a:solidFill>
                 <a:latin typeface="Nunito Sans"/>
               </a:rPr>
-              <a:t>Pregunta útil: ¿me quieren a mí, o solo que haga lo que hace el grupo?</a:t>
+              <a:t>¿Cómo lo sabe? No lo sabe: no conoce a esa chica ni ha visto lo que hace.</a:t>
             </a:r>
           </a:p>
           <a:p>
@@ -4382,50 +4358,32 @@
                 </a:solidFill>
                 <a:latin typeface="Nunito Sans"/>
               </a:rPr>
-              <a:t>En el experimento de Asch, con un solo </a:t>
-            </a:r>
+              <a:t>Pasa de «es chica» a «no vale»: juzga a una persona entera por un rasgo.</a:t>
+            </a:r>
+          </a:p>
+          <a:p>
+            <a:pPr>
+              <a:spcAft>
+                <a:spcPts val="1080"/>
+              </a:spcAft>
+            </a:pPr>
             <a:r>
               <a:rPr sz="2400" b="1">
                 <a:solidFill>
+                  <a:srgbClr val="E8793A"/>
+                </a:solidFill>
+                <a:latin typeface="Nunito Sans"/>
+              </a:rPr>
+              <a:t>4. </a:t>
+            </a:r>
+            <a:r>
+              <a:rPr sz="2400" b="0">
+                <a:solidFill>
                   <a:srgbClr val="1F2A44"/>
                 </a:solidFill>
                 <a:latin typeface="Nunito Sans"/>
               </a:rPr>
-              <a:t>aliado</a:t>
-            </a:r>
-            <a:r>
-              <a:rPr sz="2400" b="0">
-                <a:solidFill>
-                  <a:srgbClr val="1F2A44"/>
-                </a:solidFill>
-                <a:latin typeface="Nunito Sans"/>
-              </a:rPr>
-              <a:t> casi todos resistían. Un «no» ayuda a otros a decirlo.</a:t>
-            </a:r>
-          </a:p>
-          <a:p>
-            <a:pPr>
-              <a:spcAft>
-                <a:spcPts val="1080"/>
-              </a:spcAft>
-            </a:pPr>
-            <a:r>
-              <a:rPr sz="2400" b="1">
-                <a:solidFill>
-                  <a:srgbClr val="E8793A"/>
-                </a:solidFill>
-                <a:latin typeface="Nunito Sans"/>
-              </a:rPr>
-              <a:t>4. </a:t>
-            </a:r>
-            <a:r>
-              <a:rPr sz="2400" b="0">
-                <a:solidFill>
-                  <a:srgbClr val="1F2A44"/>
-                </a:solidFill>
-                <a:latin typeface="Nunito Sans"/>
-              </a:rPr>
-              <a:t>Conclusión: un amigo de verdad no te pide hacer daño a alguien para seguir siendo tu amigo.</a:t>
+              <a:t>Conclusión: es un estereotipo. Para saber si alguien vale, hay que mirar lo que hace.</a:t>
             </a:r>
           </a:p>
         </p:txBody>
@@ -4439,6 +4397,333 @@
 </file>
 
 <file path=ppt/slides/slide13.xml><?xml version="1.0" encoding="utf-8"?>
+<p:sld xmlns:a="http://schemas.openxmlformats.org/drawingml/2006/main" xmlns:p="http://schemas.openxmlformats.org/presentationml/2006/main" xmlns:r="http://schemas.openxmlformats.org/officeDocument/2006/relationships">
+  <p:cSld>
+    <p:bg>
+      <p:bgPr>
+        <a:solidFill>
+          <a:srgbClr val="FBF7EF"/>
+        </a:solidFill>
+        <a:effectLst/>
+      </p:bgPr>
+    </p:bg>
+    <p:spTree>
+      <p:nvGrpSpPr>
+        <p:cNvPr id="1" name=""/>
+        <p:cNvGrpSpPr/>
+        <p:nvPr/>
+      </p:nvGrpSpPr>
+      <p:grpSpPr/>
+      <p:sp>
+        <p:nvSpPr>
+          <p:cNvPr id="2" name="TextBox 1"/>
+          <p:cNvSpPr txBox="1"/>
+          <p:nvPr/>
+        </p:nvSpPr>
+        <p:spPr>
+          <a:xfrm>
+            <a:off x="640000" y="380000"/>
+            <a:ext cx="10912000" cy="420000"/>
+          </a:xfrm>
+          <a:prstGeom prst="rect">
+            <a:avLst/>
+          </a:prstGeom>
+          <a:noFill/>
+        </p:spPr>
+        <p:txBody>
+          <a:bodyPr wrap="square">
+            <a:spAutoFit/>
+          </a:bodyPr>
+          <a:lstStyle/>
+          <a:p>
+            <a:pPr>
+              <a:spcAft>
+                <a:spcPts val="630"/>
+              </a:spcAft>
+            </a:pPr>
+            <a:r>
+              <a:rPr sz="1400" b="1">
+                <a:solidFill>
+                  <a:srgbClr val="E8793A"/>
+                </a:solidFill>
+                <a:latin typeface="Nunito Sans"/>
+              </a:rPr>
+              <a:t>BLOQUE 2 · ESTEREOTIPOS DE GÉNERO</a:t>
+            </a:r>
+          </a:p>
+        </p:txBody>
+      </p:sp>
+      <p:sp>
+        <p:nvSpPr>
+          <p:cNvPr id="3" name="TextBox 2"/>
+          <p:cNvSpPr txBox="1"/>
+          <p:nvPr/>
+        </p:nvSpPr>
+        <p:spPr>
+          <a:xfrm>
+            <a:off x="640000" y="760000"/>
+            <a:ext cx="10912000" cy="800000"/>
+          </a:xfrm>
+          <a:prstGeom prst="rect">
+            <a:avLst/>
+          </a:prstGeom>
+          <a:noFill/>
+        </p:spPr>
+        <p:txBody>
+          <a:bodyPr wrap="square">
+            <a:spAutoFit/>
+          </a:bodyPr>
+          <a:lstStyle/>
+          <a:p>
+            <a:pPr>
+              <a:spcAft>
+                <a:spcPts val="1710"/>
+              </a:spcAft>
+            </a:pPr>
+            <a:r>
+              <a:rPr sz="3800" b="1">
+                <a:solidFill>
+                  <a:srgbClr val="1F2A44"/>
+                </a:solidFill>
+                <a:latin typeface="Fredoka"/>
+              </a:rPr>
+              <a:t>Caso 2 · Un dato no es un estereotipo</a:t>
+            </a:r>
+          </a:p>
+        </p:txBody>
+      </p:sp>
+      <p:sp>
+        <p:nvSpPr>
+          <p:cNvPr id="4" name="Rectangle 3"/>
+          <p:cNvSpPr/>
+          <p:nvPr/>
+        </p:nvSpPr>
+        <p:spPr>
+          <a:xfrm>
+            <a:off x="640000" y="1600000"/>
+            <a:ext cx="10912000" cy="1100000"/>
+          </a:xfrm>
+          <a:prstGeom prst="rect">
+            <a:avLst/>
+          </a:prstGeom>
+          <a:solidFill>
+            <a:srgbClr val="FFFFFF"/>
+          </a:solidFill>
+          <a:ln>
+            <a:noFill/>
+          </a:ln>
+        </p:spPr>
+        <p:style>
+          <a:lnRef idx="1">
+            <a:schemeClr val="accent1"/>
+          </a:lnRef>
+          <a:fillRef idx="3">
+            <a:schemeClr val="accent1"/>
+          </a:fillRef>
+          <a:effectRef idx="2">
+            <a:schemeClr val="accent1"/>
+          </a:effectRef>
+          <a:fontRef idx="minor">
+            <a:schemeClr val="lt1"/>
+          </a:fontRef>
+        </p:style>
+        <p:txBody>
+          <a:bodyPr rtlCol="0" anchor="ctr"/>
+          <a:lstStyle/>
+          <a:p>
+            <a:pPr algn="ctr"/>
+          </a:p>
+        </p:txBody>
+      </p:sp>
+      <p:sp>
+        <p:nvSpPr>
+          <p:cNvPr id="5" name="TextBox 4"/>
+          <p:cNvSpPr txBox="1"/>
+          <p:nvPr/>
+        </p:nvSpPr>
+        <p:spPr>
+          <a:xfrm>
+            <a:off x="840000" y="1650000"/>
+            <a:ext cx="10512000" cy="1000000"/>
+          </a:xfrm>
+          <a:prstGeom prst="rect">
+            <a:avLst/>
+          </a:prstGeom>
+          <a:noFill/>
+        </p:spPr>
+        <p:txBody>
+          <a:bodyPr wrap="square" anchor="ctr">
+            <a:spAutoFit/>
+          </a:bodyPr>
+          <a:lstStyle/>
+          <a:p>
+            <a:pPr>
+              <a:spcAft>
+                <a:spcPts val="1170"/>
+              </a:spcAft>
+            </a:pPr>
+            <a:r>
+              <a:rPr sz="2600" b="1">
+                <a:solidFill>
+                  <a:srgbClr val="1F2A44"/>
+                </a:solidFill>
+                <a:latin typeface="Nunito Sans"/>
+              </a:rPr>
+              <a:t>Una chica cuenta: «En mi escuela de fútbol hay 40 chicos y 12 chicas» (ejemplo inventado). Otra contesta: «¡Eso es un estereotipo!».</a:t>
+            </a:r>
+          </a:p>
+        </p:txBody>
+      </p:sp>
+      <p:sp>
+        <p:nvSpPr>
+          <p:cNvPr id="6" name="TextBox 5"/>
+          <p:cNvSpPr txBox="1"/>
+          <p:nvPr/>
+        </p:nvSpPr>
+        <p:spPr>
+          <a:xfrm>
+            <a:off x="640000" y="2900000"/>
+            <a:ext cx="10912000" cy="3500000"/>
+          </a:xfrm>
+          <a:prstGeom prst="rect">
+            <a:avLst/>
+          </a:prstGeom>
+          <a:noFill/>
+        </p:spPr>
+        <p:txBody>
+          <a:bodyPr wrap="square">
+            <a:spAutoFit/>
+          </a:bodyPr>
+          <a:lstStyle/>
+          <a:p>
+            <a:pPr>
+              <a:spcAft>
+                <a:spcPts val="1080"/>
+              </a:spcAft>
+            </a:pPr>
+            <a:r>
+              <a:rPr sz="2400" b="1">
+                <a:solidFill>
+                  <a:srgbClr val="E8793A"/>
+                </a:solidFill>
+                <a:latin typeface="Nunito Sans"/>
+              </a:rPr>
+              <a:t>1. </a:t>
+            </a:r>
+            <a:r>
+              <a:rPr sz="2400" b="0">
+                <a:solidFill>
+                  <a:srgbClr val="1F2A44"/>
+                </a:solidFill>
+                <a:latin typeface="Nunito Sans"/>
+              </a:rPr>
+              <a:t>¿Qué dice la primera? Un número: cuántos chicos y chicas se han apuntado.</a:t>
+            </a:r>
+          </a:p>
+          <a:p>
+            <a:pPr>
+              <a:spcAft>
+                <a:spcPts val="1080"/>
+              </a:spcAft>
+            </a:pPr>
+            <a:r>
+              <a:rPr sz="2400" b="1">
+                <a:solidFill>
+                  <a:srgbClr val="E8793A"/>
+                </a:solidFill>
+                <a:latin typeface="Nunito Sans"/>
+              </a:rPr>
+              <a:t>2. </a:t>
+            </a:r>
+            <a:r>
+              <a:rPr sz="2400" b="0">
+                <a:solidFill>
+                  <a:srgbClr val="1F2A44"/>
+                </a:solidFill>
+                <a:latin typeface="Nunito Sans"/>
+              </a:rPr>
+              <a:t>Eso se puede </a:t>
+            </a:r>
+            <a:r>
+              <a:rPr sz="2400" b="1">
+                <a:solidFill>
+                  <a:srgbClr val="1F2A44"/>
+                </a:solidFill>
+                <a:latin typeface="Nunito Sans"/>
+              </a:rPr>
+              <a:t>comprobar</a:t>
+            </a:r>
+            <a:r>
+              <a:rPr sz="2400" b="0">
+                <a:solidFill>
+                  <a:srgbClr val="1F2A44"/>
+                </a:solidFill>
+                <a:latin typeface="Nunito Sans"/>
+              </a:rPr>
+              <a:t> contando. Es un dato, no una idea fija.</a:t>
+            </a:r>
+          </a:p>
+          <a:p>
+            <a:pPr>
+              <a:spcAft>
+                <a:spcPts val="1080"/>
+              </a:spcAft>
+            </a:pPr>
+            <a:r>
+              <a:rPr sz="2400" b="1">
+                <a:solidFill>
+                  <a:srgbClr val="E8793A"/>
+                </a:solidFill>
+                <a:latin typeface="Nunito Sans"/>
+              </a:rPr>
+              <a:t>3. </a:t>
+            </a:r>
+            <a:r>
+              <a:rPr sz="2400" b="0">
+                <a:solidFill>
+                  <a:srgbClr val="1F2A44"/>
+                </a:solidFill>
+                <a:latin typeface="Nunito Sans"/>
+              </a:rPr>
+              <a:t>El estereotipo sería otra frase: «las chicas no saben jugar al fútbol».</a:t>
+            </a:r>
+          </a:p>
+          <a:p>
+            <a:pPr>
+              <a:spcAft>
+                <a:spcPts val="1080"/>
+              </a:spcAft>
+            </a:pPr>
+            <a:r>
+              <a:rPr sz="2400" b="1">
+                <a:solidFill>
+                  <a:srgbClr val="E8793A"/>
+                </a:solidFill>
+                <a:latin typeface="Nunito Sans"/>
+              </a:rPr>
+              <a:t>4. </a:t>
+            </a:r>
+            <a:r>
+              <a:rPr sz="2400" b="0">
+                <a:solidFill>
+                  <a:srgbClr val="1F2A44"/>
+                </a:solidFill>
+                <a:latin typeface="Nunito Sans"/>
+              </a:rPr>
+              <a:t>Conclusión: describir una diferencia no es un estereotipo. Lo es atribuir un rasgo a cada persona por su grupo.</a:t>
+            </a:r>
+          </a:p>
+        </p:txBody>
+      </p:sp>
+    </p:spTree>
+  </p:cSld>
+  <p:clrMapOvr>
+    <a:masterClrMapping/>
+  </p:clrMapOvr>
+</p:sld>
+</file>
+
+<file path=ppt/slides/slide14.xml><?xml version="1.0" encoding="utf-8"?>
 <p:sld xmlns:a="http://schemas.openxmlformats.org/drawingml/2006/main" xmlns:p="http://schemas.openxmlformats.org/presentationml/2006/main" xmlns:r="http://schemas.openxmlformats.org/officeDocument/2006/relationships">
   <p:cSld>
     <p:bg>
@@ -4490,7 +4775,7 @@
                 </a:solidFill>
                 <a:latin typeface="Nunito Sans"/>
               </a:rPr>
-              <a:t>CASO TRAMPA · BLOQUE 2 · CASOS RESUELTOS</a:t>
+              <a:t>CASO TRAMPA · BLOQUE 2 · ESTEREOTIPOS DE GÉNERO</a:t>
             </a:r>
           </a:p>
         </p:txBody>
@@ -4529,7 +4814,7 @@
                 </a:solidFill>
                 <a:latin typeface="Fredoka"/>
               </a:rPr>
-              <a:t>⚠ «Si eres mi amigo, me cubres»</a:t>
+              <a:t>⚠ Un estereotipo que suena bonito</a:t>
             </a:r>
           </a:p>
         </p:txBody>
@@ -4611,7 +4896,7 @@
                 </a:solidFill>
                 <a:latin typeface="Nunito Sans"/>
               </a:rPr>
-              <a:t>Un chico quiere que un amigo le diga a su madre que ayer estudiaron juntos. En realidad, se fue al Casco Viejo. «Si eres mi amigo, me cubres». (Ejemplo inventado.)</a:t>
+              <a:t>Un chico le dice a su hermana: «Organiza tú el cumpleaños de la ama, que las chicas sois más ordenadas». Lo dice como un elogio.</a:t>
             </a:r>
           </a:p>
         </p:txBody>
@@ -4659,7 +4944,7 @@
                 </a:solidFill>
                 <a:latin typeface="Nunito Sans"/>
               </a:rPr>
-              <a:t>Si el amigo dice que no, ¿es un mal amigo?</a:t>
+              <a:t>Si es un elogio, ¿puede ser un estereotipo?</a:t>
             </a:r>
           </a:p>
           <a:p>
@@ -4684,7 +4969,7 @@
                 </a:solidFill>
                 <a:latin typeface="Nunito Sans"/>
               </a:rPr>
-              <a:t>Parece que sí: un amigo te apoya y te cubre.</a:t>
+              <a:t>Parece que no: dice algo bueno de las chicas.</a:t>
             </a:r>
           </a:p>
           <a:p>
@@ -4709,16 +4994,48 @@
                 </a:solidFill>
                 <a:latin typeface="Nunito Sans"/>
               </a:rPr>
-              <a:t>Pero en la amistad por virtud quiero el </a:t>
-            </a:r>
+              <a:t>Pero juzga a su hermana por ser chica, no por cómo es ella.</a:t>
+            </a:r>
+          </a:p>
+          <a:p>
+            <a:pPr>
+              <a:spcAft>
+                <a:spcPts val="1080"/>
+              </a:spcAft>
+            </a:pPr>
             <a:r>
               <a:rPr sz="2400" b="1">
                 <a:solidFill>
+                  <a:srgbClr val="E8793A"/>
+                </a:solidFill>
+                <a:latin typeface="Nunito Sans"/>
+              </a:rPr>
+              <a:t>4. </a:t>
+            </a:r>
+            <a:r>
+              <a:rPr sz="2400" b="0">
+                <a:solidFill>
                   <a:srgbClr val="1F2A44"/>
                 </a:solidFill>
                 <a:latin typeface="Nunito Sans"/>
               </a:rPr>
-              <a:t>bien</a:t>
+              <a:t>Y de paso le carga a ella la tarea, y a él se la quita.</a:t>
+            </a:r>
+          </a:p>
+          <a:p>
+            <a:pPr>
+              <a:spcAft>
+                <a:spcPts val="1080"/>
+              </a:spcAft>
+            </a:pPr>
+            <a:r>
+              <a:rPr sz="2400" b="1">
+                <a:solidFill>
+                  <a:srgbClr val="E8793A"/>
+                </a:solidFill>
+                <a:latin typeface="Nunito Sans"/>
+              </a:rPr>
+              <a:t>5. </a:t>
             </a:r>
             <a:r>
               <a:rPr sz="2400" b="0">
@@ -4727,200 +5044,7 @@
                 </a:solidFill>
                 <a:latin typeface="Nunito Sans"/>
               </a:rPr>
-              <a:t> del otro, no darle todo lo que pide.</a:t>
-            </a:r>
-          </a:p>
-          <a:p>
-            <a:pPr>
-              <a:spcAft>
-                <a:spcPts val="1080"/>
-              </a:spcAft>
-            </a:pPr>
-            <a:r>
-              <a:rPr sz="2400" b="1">
-                <a:solidFill>
-                  <a:srgbClr val="E8793A"/>
-                </a:solidFill>
-                <a:latin typeface="Nunito Sans"/>
-              </a:rPr>
-              <a:t>4. </a:t>
-            </a:r>
-            <a:r>
-              <a:rPr sz="2400" b="0">
-                <a:solidFill>
-                  <a:srgbClr val="1F2A44"/>
-                </a:solidFill>
-                <a:latin typeface="Nunito Sans"/>
-              </a:rPr>
-              <a:t>Mentir por él puede meterle en líos mayores. Aristóteles añade que los buenos amigos no se piden cosas malas.</a:t>
-            </a:r>
-          </a:p>
-          <a:p>
-            <a:pPr>
-              <a:spcAft>
-                <a:spcPts val="1080"/>
-              </a:spcAft>
-            </a:pPr>
-            <a:r>
-              <a:rPr sz="2400" b="1">
-                <a:solidFill>
-                  <a:srgbClr val="E8793A"/>
-                </a:solidFill>
-                <a:latin typeface="Nunito Sans"/>
-              </a:rPr>
-              <a:t>5. </a:t>
-            </a:r>
-            <a:r>
-              <a:rPr sz="2400" b="0">
-                <a:solidFill>
-                  <a:srgbClr val="1F2A44"/>
-                </a:solidFill>
-                <a:latin typeface="Nunito Sans"/>
-              </a:rPr>
-              <a:t>Conclusión: decir «no» a algo que no está bien también puede ser cuidar al amigo.</a:t>
-            </a:r>
-          </a:p>
-        </p:txBody>
-      </p:sp>
-    </p:spTree>
-  </p:cSld>
-  <p:clrMapOvr>
-    <a:masterClrMapping/>
-  </p:clrMapOvr>
-</p:sld>
-</file>
-
-<file path=ppt/slides/slide14.xml><?xml version="1.0" encoding="utf-8"?>
-<p:sld xmlns:a="http://schemas.openxmlformats.org/drawingml/2006/main" xmlns:p="http://schemas.openxmlformats.org/presentationml/2006/main" xmlns:r="http://schemas.openxmlformats.org/officeDocument/2006/relationships">
-  <p:cSld>
-    <p:bg>
-      <p:bgPr>
-        <a:solidFill>
-          <a:srgbClr val="FBF7EF"/>
-        </a:solidFill>
-        <a:effectLst/>
-      </p:bgPr>
-    </p:bg>
-    <p:spTree>
-      <p:nvGrpSpPr>
-        <p:cNvPr id="1" name=""/>
-        <p:cNvGrpSpPr/>
-        <p:nvPr/>
-      </p:nvGrpSpPr>
-      <p:grpSpPr/>
-      <p:sp>
-        <p:nvSpPr>
-          <p:cNvPr id="2" name="TextBox 1"/>
-          <p:cNvSpPr txBox="1"/>
-          <p:nvPr/>
-        </p:nvSpPr>
-        <p:spPr>
-          <a:xfrm>
-            <a:off x="640000" y="380000"/>
-            <a:ext cx="10912000" cy="420000"/>
-          </a:xfrm>
-          <a:prstGeom prst="rect">
-            <a:avLst/>
-          </a:prstGeom>
-          <a:noFill/>
-        </p:spPr>
-        <p:txBody>
-          <a:bodyPr wrap="square">
-            <a:spAutoFit/>
-          </a:bodyPr>
-          <a:lstStyle/>
-          <a:p>
-            <a:pPr>
-              <a:spcAft>
-                <a:spcPts val="630"/>
-              </a:spcAft>
-            </a:pPr>
-            <a:r>
-              <a:rPr sz="1400" b="1">
-                <a:solidFill>
-                  <a:srgbClr val="E8793A"/>
-                </a:solidFill>
-                <a:latin typeface="Nunito Sans"/>
-              </a:rPr>
-              <a:t>LO DE HOY EN TRES LÍNEAS</a:t>
-            </a:r>
-          </a:p>
-        </p:txBody>
-      </p:sp>
-      <p:sp>
-        <p:nvSpPr>
-          <p:cNvPr id="3" name="TextBox 2"/>
-          <p:cNvSpPr txBox="1"/>
-          <p:nvPr/>
-        </p:nvSpPr>
-        <p:spPr>
-          <a:xfrm>
-            <a:off x="640000" y="760000"/>
-            <a:ext cx="10912000" cy="800000"/>
-          </a:xfrm>
-          <a:prstGeom prst="rect">
-            <a:avLst/>
-          </a:prstGeom>
-          <a:noFill/>
-        </p:spPr>
-        <p:txBody>
-          <a:bodyPr wrap="square">
-            <a:spAutoFit/>
-          </a:bodyPr>
-          <a:lstStyle/>
-          <a:p>
-            <a:pPr>
-              <a:spcAft>
-                <a:spcPts val="1710"/>
-              </a:spcAft>
-            </a:pPr>
-            <a:r>
-              <a:rPr sz="3800" b="1">
-                <a:solidFill>
-                  <a:srgbClr val="1F2A44"/>
-                </a:solidFill>
-                <a:latin typeface="Fredoka"/>
-              </a:rPr>
-              <a:t>Escríbelo tú primero, sin mirar</a:t>
-            </a:r>
-          </a:p>
-        </p:txBody>
-      </p:sp>
-      <p:sp>
-        <p:nvSpPr>
-          <p:cNvPr id="4" name="TextBox 3"/>
-          <p:cNvSpPr txBox="1"/>
-          <p:nvPr/>
-        </p:nvSpPr>
-        <p:spPr>
-          <a:xfrm>
-            <a:off x="640000" y="1800000"/>
-            <a:ext cx="10912000" cy="1500000"/>
-          </a:xfrm>
-          <a:prstGeom prst="rect">
-            <a:avLst/>
-          </a:prstGeom>
-          <a:noFill/>
-        </p:spPr>
-        <p:txBody>
-          <a:bodyPr wrap="square">
-            <a:spAutoFit/>
-          </a:bodyPr>
-          <a:lstStyle/>
-          <a:p>
-            <a:pPr>
-              <a:spcAft>
-                <a:spcPts val="1170"/>
-              </a:spcAft>
-            </a:pPr>
-            <a:r>
-              <a:rPr sz="2600" b="0">
-                <a:solidFill>
-                  <a:srgbClr val="4A5568"/>
-                </a:solidFill>
-                <a:latin typeface="Nunito Sans"/>
-              </a:rPr>
-              <a:t>Dos minutos. Después lo comparamos.</a:t>
+              <a:t>Conclusión: un estereotipo que suena bien sigue siendo un estereotipo. También encierra a las personas en un papel.</a:t>
             </a:r>
           </a:p>
         </p:txBody>
@@ -4998,8 +5122,8 @@
         </p:nvSpPr>
         <p:spPr>
           <a:xfrm>
-            <a:off x="640000" y="1300000"/>
-            <a:ext cx="10912000" cy="4800000"/>
+            <a:off x="640000" y="760000"/>
+            <a:ext cx="10912000" cy="800000"/>
           </a:xfrm>
           <a:prstGeom prst="rect">
             <a:avLst/>
@@ -5014,76 +5138,56 @@
           <a:p>
             <a:pPr>
               <a:spcAft>
-                <a:spcPts val="1350"/>
-              </a:spcAft>
-            </a:pPr>
-            <a:r>
-              <a:rPr sz="3000" b="1">
-                <a:solidFill>
-                  <a:srgbClr val="E8793A"/>
-                </a:solidFill>
-                <a:latin typeface="Nunito Sans"/>
-              </a:rPr>
-              <a:t>1. </a:t>
-            </a:r>
-            <a:r>
-              <a:rPr sz="3000" b="0">
+                <a:spcPts val="1710"/>
+              </a:spcAft>
+            </a:pPr>
+            <a:r>
+              <a:rPr sz="3800" b="1">
                 <a:solidFill>
                   <a:srgbClr val="1F2A44"/>
                 </a:solidFill>
-                <a:latin typeface="Nunito Sans"/>
-              </a:rPr>
-              <a:t>Para Aristóteles, la amistad es quererse bien de forma mutua y saberlo.</a:t>
-            </a:r>
-          </a:p>
-          <a:p>
-            <a:pPr>
-              <a:spcAft>
-                <a:spcPts val="1350"/>
-              </a:spcAft>
-            </a:pPr>
-            <a:r>
-              <a:rPr sz="3000" b="1">
-                <a:solidFill>
-                  <a:srgbClr val="E8793A"/>
-                </a:solidFill>
-                <a:latin typeface="Nunito Sans"/>
-              </a:rPr>
-              <a:t>2. </a:t>
-            </a:r>
-            <a:r>
-              <a:rPr sz="3000" b="0">
-                <a:solidFill>
-                  <a:srgbClr val="1F2A44"/>
-                </a:solidFill>
-                <a:latin typeface="Nunito Sans"/>
-              </a:rPr>
-              <a:t>Hay amistad por utilidad, por placer y por virtud, que quiere a la persona misma.</a:t>
-            </a:r>
-          </a:p>
-          <a:p>
-            <a:pPr>
-              <a:spcAft>
-                <a:spcPts val="1350"/>
-              </a:spcAft>
-            </a:pPr>
-            <a:r>
-              <a:rPr sz="3000" b="1">
-                <a:solidFill>
-                  <a:srgbClr val="E8793A"/>
-                </a:solidFill>
-                <a:latin typeface="Nunito Sans"/>
-              </a:rPr>
-              <a:t>3. </a:t>
-            </a:r>
-            <a:r>
-              <a:rPr sz="3000" b="0">
-                <a:solidFill>
-                  <a:srgbClr val="1F2A44"/>
-                </a:solidFill>
-                <a:latin typeface="Nunito Sans"/>
-              </a:rPr>
-              <a:t>Un buen amigo quiere tu bien: a veces eso significa decir que no.</a:t>
+                <a:latin typeface="Fredoka"/>
+              </a:rPr>
+              <a:t>Escríbelo tú primero, sin mirar</a:t>
+            </a:r>
+          </a:p>
+        </p:txBody>
+      </p:sp>
+      <p:sp>
+        <p:nvSpPr>
+          <p:cNvPr id="4" name="TextBox 3"/>
+          <p:cNvSpPr txBox="1"/>
+          <p:nvPr/>
+        </p:nvSpPr>
+        <p:spPr>
+          <a:xfrm>
+            <a:off x="640000" y="1800000"/>
+            <a:ext cx="10912000" cy="1500000"/>
+          </a:xfrm>
+          <a:prstGeom prst="rect">
+            <a:avLst/>
+          </a:prstGeom>
+          <a:noFill/>
+        </p:spPr>
+        <p:txBody>
+          <a:bodyPr wrap="square">
+            <a:spAutoFit/>
+          </a:bodyPr>
+          <a:lstStyle/>
+          <a:p>
+            <a:pPr>
+              <a:spcAft>
+                <a:spcPts val="1170"/>
+              </a:spcAft>
+            </a:pPr>
+            <a:r>
+              <a:rPr sz="2600" b="0">
+                <a:solidFill>
+                  <a:srgbClr val="4A5568"/>
+                </a:solidFill>
+                <a:latin typeface="Nunito Sans"/>
+              </a:rPr>
+              <a:t>Dos minutos. Después lo comparamos.</a:t>
             </a:r>
           </a:p>
         </p:txBody>
@@ -5102,7 +5206,7 @@
     <p:bg>
       <p:bgPr>
         <a:solidFill>
-          <a:srgbClr val="1F2A44"/>
+          <a:srgbClr val="FBF7EF"/>
         </a:solidFill>
         <a:effectLst/>
       </p:bgPr>
@@ -5144,11 +5248,11 @@
             <a:r>
               <a:rPr sz="1400" b="1">
                 <a:solidFill>
-                  <a:srgbClr val="F4B183"/>
-                </a:solidFill>
-                <a:latin typeface="Nunito Sans"/>
-              </a:rPr>
-              <a:t>VÍDEO</a:t>
+                  <a:srgbClr val="E8793A"/>
+                </a:solidFill>
+                <a:latin typeface="Nunito Sans"/>
+              </a:rPr>
+              <a:t>LO DE HOY EN TRES LÍNEAS</a:t>
             </a:r>
           </a:p>
         </p:txBody>
@@ -5161,8 +5265,8 @@
         </p:nvSpPr>
         <p:spPr>
           <a:xfrm>
-            <a:off x="640000" y="760000"/>
-            <a:ext cx="10912000" cy="800000"/>
+            <a:off x="640000" y="1300000"/>
+            <a:ext cx="10912000" cy="4800000"/>
           </a:xfrm>
           <a:prstGeom prst="rect">
             <a:avLst/>
@@ -5177,56 +5281,76 @@
           <a:p>
             <a:pPr>
               <a:spcAft>
-                <a:spcPts val="1620"/>
-              </a:spcAft>
-            </a:pPr>
-            <a:r>
-              <a:rPr sz="3600" b="1">
-                <a:solidFill>
-                  <a:srgbClr val="FBF7EF"/>
-                </a:solidFill>
-                <a:latin typeface="Fredoka"/>
-              </a:rPr>
-              <a:t>Los tres tipos de amistad según Aristóteles</a:t>
-            </a:r>
-          </a:p>
-        </p:txBody>
-      </p:sp>
-      <p:sp>
-        <p:nvSpPr>
-          <p:cNvPr id="4" name="TextBox 3"/>
-          <p:cNvSpPr txBox="1"/>
-          <p:nvPr/>
-        </p:nvSpPr>
-        <p:spPr>
-          <a:xfrm>
-            <a:off x="640000" y="2200000"/>
-            <a:ext cx="10912000" cy="2000000"/>
-          </a:xfrm>
-          <a:prstGeom prst="rect">
-            <a:avLst/>
-          </a:prstGeom>
-          <a:noFill/>
-        </p:spPr>
-        <p:txBody>
-          <a:bodyPr wrap="square">
-            <a:spAutoFit/>
-          </a:bodyPr>
-          <a:lstStyle/>
-          <a:p>
-            <a:pPr>
-              <a:spcAft>
-                <a:spcPts val="1080"/>
-              </a:spcAft>
-            </a:pPr>
-            <a:r>
-              <a:rPr sz="2400" b="0">
-                <a:solidFill>
-                  <a:srgbClr val="C9D3E6"/>
-                </a:solidFill>
-                <a:latin typeface="Nunito Sans"/>
-              </a:rPr>
-              <a:t>Ver con otros ejemplos la diferencia entre amistad por utilidad, por placer y por virtud.</a:t>
+                <a:spcPts val="1350"/>
+              </a:spcAft>
+            </a:pPr>
+            <a:r>
+              <a:rPr sz="3000" b="1">
+                <a:solidFill>
+                  <a:srgbClr val="E8793A"/>
+                </a:solidFill>
+                <a:latin typeface="Nunito Sans"/>
+              </a:rPr>
+              <a:t>1. </a:t>
+            </a:r>
+            <a:r>
+              <a:rPr sz="3000" b="0">
+                <a:solidFill>
+                  <a:srgbClr val="1F2A44"/>
+                </a:solidFill>
+                <a:latin typeface="Nunito Sans"/>
+              </a:rPr>
+              <a:t>Solemos distinguir el sexo, que es biológico, del género, que es social.</a:t>
+            </a:r>
+          </a:p>
+          <a:p>
+            <a:pPr>
+              <a:spcAft>
+                <a:spcPts val="1350"/>
+              </a:spcAft>
+            </a:pPr>
+            <a:r>
+              <a:rPr sz="3000" b="1">
+                <a:solidFill>
+                  <a:srgbClr val="E8793A"/>
+                </a:solidFill>
+                <a:latin typeface="Nunito Sans"/>
+              </a:rPr>
+              <a:t>2. </a:t>
+            </a:r>
+            <a:r>
+              <a:rPr sz="3000" b="0">
+                <a:solidFill>
+                  <a:srgbClr val="1F2A44"/>
+                </a:solidFill>
+                <a:latin typeface="Nunito Sans"/>
+              </a:rPr>
+              <a:t>Los roles de género se aprenden y cambian con las épocas y los lugares.</a:t>
+            </a:r>
+          </a:p>
+          <a:p>
+            <a:pPr>
+              <a:spcAft>
+                <a:spcPts val="1350"/>
+              </a:spcAft>
+            </a:pPr>
+            <a:r>
+              <a:rPr sz="3000" b="1">
+                <a:solidFill>
+                  <a:srgbClr val="E8793A"/>
+                </a:solidFill>
+                <a:latin typeface="Nunito Sans"/>
+              </a:rPr>
+              <a:t>3. </a:t>
+            </a:r>
+            <a:r>
+              <a:rPr sz="3000" b="0">
+                <a:solidFill>
+                  <a:srgbClr val="1F2A44"/>
+                </a:solidFill>
+                <a:latin typeface="Nunito Sans"/>
+              </a:rPr>
+              <a:t>Un estereotipo de género juzga a una persona por su grupo, aunque suene a elogio.</a:t>
             </a:r>
           </a:p>
         </p:txBody>
@@ -5291,6 +5415,149 @@
                 </a:solidFill>
                 <a:latin typeface="Nunito Sans"/>
               </a:rPr>
+              <a:t>VÍDEO</a:t>
+            </a:r>
+          </a:p>
+        </p:txBody>
+      </p:sp>
+      <p:sp>
+        <p:nvSpPr>
+          <p:cNvPr id="3" name="TextBox 2"/>
+          <p:cNvSpPr txBox="1"/>
+          <p:nvPr/>
+        </p:nvSpPr>
+        <p:spPr>
+          <a:xfrm>
+            <a:off x="640000" y="760000"/>
+            <a:ext cx="10912000" cy="800000"/>
+          </a:xfrm>
+          <a:prstGeom prst="rect">
+            <a:avLst/>
+          </a:prstGeom>
+          <a:noFill/>
+        </p:spPr>
+        <p:txBody>
+          <a:bodyPr wrap="square">
+            <a:spAutoFit/>
+          </a:bodyPr>
+          <a:lstStyle/>
+          <a:p>
+            <a:pPr>
+              <a:spcAft>
+                <a:spcPts val="1620"/>
+              </a:spcAft>
+            </a:pPr>
+            <a:r>
+              <a:rPr sz="3600" b="1">
+                <a:solidFill>
+                  <a:srgbClr val="FBF7EF"/>
+                </a:solidFill>
+                <a:latin typeface="Fredoka"/>
+              </a:rPr>
+              <a:t>La diferencia entre sexo y género y qué son los estereotipos de género</a:t>
+            </a:r>
+          </a:p>
+        </p:txBody>
+      </p:sp>
+      <p:sp>
+        <p:nvSpPr>
+          <p:cNvPr id="4" name="TextBox 3"/>
+          <p:cNvSpPr txBox="1"/>
+          <p:nvPr/>
+        </p:nvSpPr>
+        <p:spPr>
+          <a:xfrm>
+            <a:off x="640000" y="2200000"/>
+            <a:ext cx="10912000" cy="2000000"/>
+          </a:xfrm>
+          <a:prstGeom prst="rect">
+            <a:avLst/>
+          </a:prstGeom>
+          <a:noFill/>
+        </p:spPr>
+        <p:txBody>
+          <a:bodyPr wrap="square">
+            <a:spAutoFit/>
+          </a:bodyPr>
+          <a:lstStyle/>
+          <a:p>
+            <a:pPr>
+              <a:spcAft>
+                <a:spcPts val="1080"/>
+              </a:spcAft>
+            </a:pPr>
+            <a:r>
+              <a:rPr sz="2400" b="0">
+                <a:solidFill>
+                  <a:srgbClr val="C9D3E6"/>
+                </a:solidFill>
+                <a:latin typeface="Nunito Sans"/>
+              </a:rPr>
+              <a:t>Oír con otras palabras la distinción de hoy y ver ejemplos de estereotipos en anuncios y juguetes.</a:t>
+            </a:r>
+          </a:p>
+        </p:txBody>
+      </p:sp>
+    </p:spTree>
+  </p:cSld>
+  <p:clrMapOvr>
+    <a:masterClrMapping/>
+  </p:clrMapOvr>
+</p:sld>
+</file>
+
+<file path=ppt/slides/slide18.xml><?xml version="1.0" encoding="utf-8"?>
+<p:sld xmlns:a="http://schemas.openxmlformats.org/drawingml/2006/main" xmlns:p="http://schemas.openxmlformats.org/presentationml/2006/main" xmlns:r="http://schemas.openxmlformats.org/officeDocument/2006/relationships">
+  <p:cSld>
+    <p:bg>
+      <p:bgPr>
+        <a:solidFill>
+          <a:srgbClr val="1F2A44"/>
+        </a:solidFill>
+        <a:effectLst/>
+      </p:bgPr>
+    </p:bg>
+    <p:spTree>
+      <p:nvGrpSpPr>
+        <p:cNvPr id="1" name=""/>
+        <p:cNvGrpSpPr/>
+        <p:nvPr/>
+      </p:nvGrpSpPr>
+      <p:grpSpPr/>
+      <p:sp>
+        <p:nvSpPr>
+          <p:cNvPr id="2" name="TextBox 1"/>
+          <p:cNvSpPr txBox="1"/>
+          <p:nvPr/>
+        </p:nvSpPr>
+        <p:spPr>
+          <a:xfrm>
+            <a:off x="640000" y="380000"/>
+            <a:ext cx="10912000" cy="420000"/>
+          </a:xfrm>
+          <a:prstGeom prst="rect">
+            <a:avLst/>
+          </a:prstGeom>
+          <a:noFill/>
+        </p:spPr>
+        <p:txBody>
+          <a:bodyPr wrap="square">
+            <a:spAutoFit/>
+          </a:bodyPr>
+          <a:lstStyle/>
+          <a:p>
+            <a:pPr>
+              <a:spcAft>
+                <a:spcPts val="630"/>
+              </a:spcAft>
+            </a:pPr>
+            <a:r>
+              <a:rPr sz="1400" b="1">
+                <a:solidFill>
+                  <a:srgbClr val="F4B183"/>
+                </a:solidFill>
+                <a:latin typeface="Nunito Sans"/>
+              </a:rPr>
               <a:t>AHORA, LA HOJA DEL DÍA</a:t>
             </a:r>
           </a:p>
@@ -5884,7 +6151,7 @@
                 </a:solidFill>
                 <a:latin typeface="Nunito Sans"/>
               </a:rPr>
-              <a:t>Una ______ puede reenviarse, recortarse o sacarse de contexto.  (sesión 77)</a:t>
+              <a:t>Una familia ______ la forma una pareja con hijos de relaciones anteriores.  (sesión 77)</a:t>
             </a:r>
           </a:p>
           <a:p>
@@ -5909,7 +6176,7 @@
                 </a:solidFill>
                 <a:latin typeface="Nunito Sans"/>
               </a:rPr>
-              <a:t>Antes de subir fotos o vídeos de otros hay que pedir ______.  (sesión 77)</a:t>
+              <a:t>Tomar mi familia como «la normal» es una generalización ______.  (sesión 77)</a:t>
             </a:r>
           </a:p>
           <a:p>
@@ -6086,7 +6353,7 @@
                 </a:solidFill>
                 <a:latin typeface="Nunito Sans"/>
               </a:rPr>
-              <a:t>Una </a:t>
+              <a:t>Una familia </a:t>
             </a:r>
             <a:r>
               <a:rPr sz="2600" b="1">
@@ -6095,7 +6362,7 @@
                 </a:solidFill>
                 <a:latin typeface="Nunito Sans"/>
               </a:rPr>
-              <a:t>captura</a:t>
+              <a:t>reconstituida</a:t>
             </a:r>
             <a:r>
               <a:rPr sz="2600" b="0">
@@ -6104,7 +6371,7 @@
                 </a:solidFill>
                 <a:latin typeface="Nunito Sans"/>
               </a:rPr>
-              <a:t> puede reenviarse, recortarse o sacarse de contexto.  (sesión 77)</a:t>
+              <a:t> la forma una pareja con hijos de relaciones anteriores.  (sesión 77)</a:t>
             </a:r>
           </a:p>
           <a:p>
@@ -6129,7 +6396,7 @@
                 </a:solidFill>
                 <a:latin typeface="Nunito Sans"/>
               </a:rPr>
-              <a:t>Antes de subir fotos o vídeos de otros hay que pedir </a:t>
+              <a:t>Tomar mi familia como «la normal» es una generalización </a:t>
             </a:r>
             <a:r>
               <a:rPr sz="2600" b="1">
@@ -6138,7 +6405,7 @@
                 </a:solidFill>
                 <a:latin typeface="Nunito Sans"/>
               </a:rPr>
-              <a:t>permiso</a:t>
+              <a:t>apresurada</a:t>
             </a:r>
             <a:r>
               <a:rPr sz="2600" b="0">
@@ -6337,7 +6604,7 @@
                 </a:solidFill>
                 <a:latin typeface="Nunito Sans"/>
               </a:rPr>
-              <a:t>Un chico tiene 600 seguidores en Instagram y un grupo de WhatsApp con 30 personas de la cuadrilla.</a:t>
+              <a:t>En una tienda de juguetes hay dos pasillos: uno rosa, con muñecas y cocinitas; otro azul, con balones y coches.</a:t>
             </a:r>
           </a:p>
         </p:txBody>
@@ -6376,7 +6643,7 @@
                 </a:solidFill>
                 <a:latin typeface="Nunito Sans"/>
               </a:rPr>
-              <a:t>¿Cuántos de ellos son amigos de verdad? ¿Cómo lo sabes?</a:t>
+              <a:t>¿Quién decidió qué juguetes son «de chicas» y cuáles «de chicos»?</a:t>
             </a:r>
           </a:p>
         </p:txBody>
@@ -6480,7 +6747,7 @@
                 </a:solidFill>
                 <a:latin typeface="Fredoka"/>
               </a:rPr>
-              <a:t>Tres tipos de amistad</a:t>
+              <a:t>Dos palabras distintas</a:t>
             </a:r>
           </a:p>
         </p:txBody>
@@ -6545,7 +6812,7 @@
                 </a:solidFill>
                 <a:latin typeface="Nunito Sans"/>
               </a:rPr>
-              <a:t>BLOQUE 1 · TRES TIPOS DE AMISTAD</a:t>
+              <a:t>BLOQUE 1 · DOS PALABRAS DISTINTAS</a:t>
             </a:r>
           </a:p>
         </p:txBody>
@@ -6558,8 +6825,8 @@
         </p:nvSpPr>
         <p:spPr>
           <a:xfrm>
-            <a:off x="640000" y="1500000"/>
-            <a:ext cx="10912000" cy="3000000"/>
+            <a:off x="640000" y="760000"/>
+            <a:ext cx="10912000" cy="800000"/>
           </a:xfrm>
           <a:prstGeom prst="rect">
             <a:avLst/>
@@ -6574,31 +6841,74 @@
           <a:p>
             <a:pPr>
               <a:spcAft>
-                <a:spcPts val="1530"/>
-              </a:spcAft>
-            </a:pPr>
-            <a:r>
-              <a:rPr sz="3400" b="1">
+                <a:spcPts val="1710"/>
+              </a:spcAft>
+            </a:pPr>
+            <a:r>
+              <a:rPr sz="3800" b="1">
                 <a:solidFill>
                   <a:srgbClr val="1F2A44"/>
                 </a:solidFill>
-                <a:latin typeface="Nunito Sans"/>
-              </a:rPr>
-              <a:t>Sin amigos nadie querría vivir, aunque tuviera todos los demás bienes.</a:t>
-            </a:r>
-          </a:p>
-        </p:txBody>
-      </p:sp>
-      <p:sp>
-        <p:nvSpPr>
-          <p:cNvPr id="4" name="TextBox 3"/>
+                <a:latin typeface="Fredoka"/>
+              </a:rPr>
+              <a:t>Sexo</a:t>
+            </a:r>
+          </a:p>
+        </p:txBody>
+      </p:sp>
+      <p:sp>
+        <p:nvSpPr>
+          <p:cNvPr id="4" name="Rectangle 3"/>
+          <p:cNvSpPr/>
+          <p:nvPr/>
+        </p:nvSpPr>
+        <p:spPr>
+          <a:xfrm>
+            <a:off x="640000" y="1650000"/>
+            <a:ext cx="10912000" cy="1150000"/>
+          </a:xfrm>
+          <a:prstGeom prst="rect">
+            <a:avLst/>
+          </a:prstGeom>
+          <a:solidFill>
+            <a:srgbClr val="EAF0F7"/>
+          </a:solidFill>
+          <a:ln>
+            <a:noFill/>
+          </a:ln>
+        </p:spPr>
+        <p:style>
+          <a:lnRef idx="1">
+            <a:schemeClr val="accent1"/>
+          </a:lnRef>
+          <a:fillRef idx="3">
+            <a:schemeClr val="accent1"/>
+          </a:fillRef>
+          <a:effectRef idx="2">
+            <a:schemeClr val="accent1"/>
+          </a:effectRef>
+          <a:fontRef idx="minor">
+            <a:schemeClr val="lt1"/>
+          </a:fontRef>
+        </p:style>
+        <p:txBody>
+          <a:bodyPr rtlCol="0" anchor="ctr"/>
+          <a:lstStyle/>
+          <a:p>
+            <a:pPr algn="ctr"/>
+          </a:p>
+        </p:txBody>
+      </p:sp>
+      <p:sp>
+        <p:nvSpPr>
+          <p:cNvPr id="5" name="TextBox 4"/>
           <p:cNvSpPr txBox="1"/>
           <p:nvPr/>
         </p:nvSpPr>
         <p:spPr>
           <a:xfrm>
-            <a:off x="640000" y="4700000"/>
-            <a:ext cx="10912000" cy="600000"/>
+            <a:off x="840000" y="1730000"/>
+            <a:ext cx="10512000" cy="1000000"/>
           </a:xfrm>
           <a:prstGeom prst="rect">
             <a:avLst/>
@@ -6606,6 +6916,45 @@
           <a:noFill/>
         </p:spPr>
         <p:txBody>
+          <a:bodyPr wrap="square" anchor="ctr">
+            <a:spAutoFit/>
+          </a:bodyPr>
+          <a:lstStyle/>
+          <a:p>
+            <a:pPr>
+              <a:spcAft>
+                <a:spcPts val="1260"/>
+              </a:spcAft>
+            </a:pPr>
+            <a:r>
+              <a:rPr sz="2800" b="1">
+                <a:solidFill>
+                  <a:srgbClr val="1F2A44"/>
+                </a:solidFill>
+                <a:latin typeface="Nunito Sans"/>
+              </a:rPr>
+              <a:t>Llamamos sexo a las características biológicas del cuerpo: cromosomas, hormonas y órganos.</a:t>
+            </a:r>
+          </a:p>
+        </p:txBody>
+      </p:sp>
+      <p:sp>
+        <p:nvSpPr>
+          <p:cNvPr id="6" name="TextBox 5"/>
+          <p:cNvSpPr txBox="1"/>
+          <p:nvPr/>
+        </p:nvSpPr>
+        <p:spPr>
+          <a:xfrm>
+            <a:off x="640000" y="3000000"/>
+            <a:ext cx="10912000" cy="3458000"/>
+          </a:xfrm>
+          <a:prstGeom prst="rect">
+            <a:avLst/>
+          </a:prstGeom>
+          <a:noFill/>
+        </p:spPr>
+        <p:txBody>
           <a:bodyPr wrap="square">
             <a:spAutoFit/>
           </a:bodyPr>
@@ -6613,17 +6962,103 @@
           <a:p>
             <a:pPr>
               <a:spcAft>
-                <a:spcPts val="990"/>
-              </a:spcAft>
-            </a:pPr>
-            <a:r>
-              <a:rPr sz="2200" b="0">
-                <a:solidFill>
-                  <a:srgbClr val="4A5568"/>
-                </a:solidFill>
-                <a:latin typeface="Nunito Sans"/>
-              </a:rPr>
-              <a:t>Aristóteles, «Ética a Nicómaco», libro VIII (siglo IV a. C.)</a:t>
+                <a:spcPts val="1260"/>
+              </a:spcAft>
+            </a:pPr>
+            <a:r>
+              <a:rPr sz="2800" b="1">
+                <a:solidFill>
+                  <a:srgbClr val="E8793A"/>
+                </a:solidFill>
+                <a:latin typeface="Nunito Sans"/>
+              </a:rPr>
+              <a:t>• </a:t>
+            </a:r>
+            <a:r>
+              <a:rPr sz="2800" b="0">
+                <a:solidFill>
+                  <a:srgbClr val="1F2A44"/>
+                </a:solidFill>
+                <a:latin typeface="Nunito Sans"/>
+              </a:rPr>
+              <a:t>Viene con el </a:t>
+            </a:r>
+            <a:r>
+              <a:rPr sz="2800" b="1">
+                <a:solidFill>
+                  <a:srgbClr val="1F2A44"/>
+                </a:solidFill>
+                <a:latin typeface="Nunito Sans"/>
+              </a:rPr>
+              <a:t>cuerpo</a:t>
+            </a:r>
+          </a:p>
+          <a:p>
+            <a:pPr>
+              <a:spcAft>
+                <a:spcPts val="1260"/>
+              </a:spcAft>
+            </a:pPr>
+            <a:r>
+              <a:rPr sz="2800" b="1">
+                <a:solidFill>
+                  <a:srgbClr val="E8793A"/>
+                </a:solidFill>
+                <a:latin typeface="Nunito Sans"/>
+              </a:rPr>
+              <a:t>• </a:t>
+            </a:r>
+            <a:r>
+              <a:rPr sz="2800" b="0">
+                <a:solidFill>
+                  <a:srgbClr val="1F2A44"/>
+                </a:solidFill>
+                <a:latin typeface="Nunito Sans"/>
+              </a:rPr>
+              <a:t>Lo estudian la </a:t>
+            </a:r>
+            <a:r>
+              <a:rPr sz="2800" b="1">
+                <a:solidFill>
+                  <a:srgbClr val="1F2A44"/>
+                </a:solidFill>
+                <a:latin typeface="Nunito Sans"/>
+              </a:rPr>
+              <a:t>biología</a:t>
+            </a:r>
+            <a:r>
+              <a:rPr sz="2800" b="0">
+                <a:solidFill>
+                  <a:srgbClr val="1F2A44"/>
+                </a:solidFill>
+                <a:latin typeface="Nunito Sans"/>
+              </a:rPr>
+              <a:t> y la medicina</a:t>
+            </a:r>
+          </a:p>
+          <a:p>
+            <a:pPr>
+              <a:spcAft>
+                <a:spcPts val="1260"/>
+              </a:spcAft>
+            </a:pPr>
+            <a:r>
+              <a:rPr sz="2800" b="1">
+                <a:solidFill>
+                  <a:srgbClr val="E8793A"/>
+                </a:solidFill>
+                <a:latin typeface="Nunito Sans"/>
+              </a:rPr>
+              <a:t>• </a:t>
+            </a:r>
+            <a:r>
+              <a:rPr sz="2800" b="0">
+                <a:solidFill>
+                  <a:srgbClr val="1F2A44"/>
+                </a:solidFill>
+                <a:latin typeface="Nunito Sans"/>
+              </a:rPr>
+              <a:t>Ejemplo: la voz cambia en la pubertad por las hormonas</a:t>
             </a:r>
           </a:p>
         </p:txBody>
@@ -6688,7 +7123,7 @@
                 </a:solidFill>
                 <a:latin typeface="Nunito Sans"/>
               </a:rPr>
-              <a:t>BLOQUE 1 · TRES TIPOS DE AMISTAD</a:t>
+              <a:t>BLOQUE 1 · DOS PALABRAS DISTINTAS</a:t>
             </a:r>
           </a:p>
         </p:txBody>
@@ -6727,7 +7162,7 @@
                 </a:solidFill>
                 <a:latin typeface="Fredoka"/>
               </a:rPr>
-              <a:t>Amistad</a:t>
+              <a:t>Género</a:t>
             </a:r>
           </a:p>
         </p:txBody>
@@ -6809,25 +7244,7 @@
                 </a:solidFill>
                 <a:latin typeface="Nunito Sans"/>
               </a:rPr>
-              <a:t>Para Aristóteles, la </a:t>
-            </a:r>
-            <a:r>
-              <a:rPr sz="2800" b="1">
-                <a:solidFill>
-                  <a:srgbClr val="1F2A44"/>
-                </a:solidFill>
-                <a:latin typeface="Nunito Sans"/>
-              </a:rPr>
-              <a:t>amistad</a:t>
-            </a:r>
-            <a:r>
-              <a:rPr sz="2800" b="1">
-                <a:solidFill>
-                  <a:srgbClr val="1F2A44"/>
-                </a:solidFill>
-                <a:latin typeface="Nunito Sans"/>
-              </a:rPr>
-              <a:t> es quererse bien de forma mutua y saberlo: cada uno desea el bien del otro.</a:t>
+              <a:t>El género son los roles y las expectativas que una sociedad asocia a ser hombre o mujer.</a:t>
             </a:r>
           </a:p>
         </p:txBody>
@@ -6869,22 +7286,56 @@
               <a:t>• </a:t>
             </a:r>
             <a:r>
+              <a:rPr sz="2800" b="1">
+                <a:solidFill>
+                  <a:srgbClr val="1F2A44"/>
+                </a:solidFill>
+                <a:latin typeface="Nunito Sans"/>
+              </a:rPr>
+              <a:t>Rol:</a:t>
+            </a:r>
+            <a:r>
               <a:rPr sz="2800" b="0">
                 <a:solidFill>
                   <a:srgbClr val="1F2A44"/>
                 </a:solidFill>
                 <a:latin typeface="Nunito Sans"/>
               </a:rPr>
-              <a:t>Es </a:t>
-            </a:r>
+              <a:t> el papel que se espera que hagas</a:t>
+            </a:r>
+          </a:p>
+          <a:p>
+            <a:pPr>
+              <a:spcAft>
+                <a:spcPts val="1260"/>
+              </a:spcAft>
+            </a:pPr>
             <a:r>
               <a:rPr sz="2800" b="1">
                 <a:solidFill>
+                  <a:srgbClr val="E8793A"/>
+                </a:solidFill>
+                <a:latin typeface="Nunito Sans"/>
+              </a:rPr>
+              <a:t>• </a:t>
+            </a:r>
+            <a:r>
+              <a:rPr sz="2800" b="0">
+                <a:solidFill>
                   <a:srgbClr val="1F2A44"/>
                 </a:solidFill>
                 <a:latin typeface="Nunito Sans"/>
               </a:rPr>
-              <a:t>mutua</a:t>
+              <a:t>Se </a:t>
+            </a:r>
+            <a:r>
+              <a:rPr sz="2800" b="1">
+                <a:solidFill>
+                  <a:srgbClr val="1F2A44"/>
+                </a:solidFill>
+                <a:latin typeface="Nunito Sans"/>
+              </a:rPr>
+              <a:t>aprende</a:t>
             </a:r>
             <a:r>
               <a:rPr sz="2800" b="0">
@@ -6893,7 +7344,7 @@
                 </a:solidFill>
                 <a:latin typeface="Nunito Sans"/>
               </a:rPr>
-              <a:t>: si solo quiere uno, no es amistad</a:t>
+              <a:t>: en casa, en la escuela, en las pantallas</a:t>
             </a:r>
           </a:p>
           <a:p>
@@ -6918,16 +7369,32 @@
                 </a:solidFill>
                 <a:latin typeface="Nunito Sans"/>
               </a:rPr>
-              <a:t>Los dos lo </a:t>
-            </a:r>
+              <a:t>Ejemplo: «los chicos no lloran», «las chicas cuidan»</a:t>
+            </a:r>
+          </a:p>
+          <a:p>
+            <a:pPr>
+              <a:spcAft>
+                <a:spcPts val="1260"/>
+              </a:spcAft>
+            </a:pPr>
             <a:r>
               <a:rPr sz="2800" b="1">
                 <a:solidFill>
+                  <a:srgbClr val="E8793A"/>
+                </a:solidFill>
+                <a:latin typeface="Nunito Sans"/>
+              </a:rPr>
+              <a:t>• </a:t>
+            </a:r>
+            <a:r>
+              <a:rPr sz="2800" b="1">
+                <a:solidFill>
                   <a:srgbClr val="1F2A44"/>
                 </a:solidFill>
                 <a:latin typeface="Nunito Sans"/>
               </a:rPr>
-              <a:t>saben</a:t>
+              <a:t>Solemos distinguir</a:t>
             </a:r>
             <a:r>
               <a:rPr sz="2800" b="0">
@@ -6936,32 +7403,7 @@
                 </a:solidFill>
                 <a:latin typeface="Nunito Sans"/>
               </a:rPr>
-              <a:t>: no es un cariño escondido</a:t>
-            </a:r>
-          </a:p>
-          <a:p>
-            <a:pPr>
-              <a:spcAft>
-                <a:spcPts val="1260"/>
-              </a:spcAft>
-            </a:pPr>
-            <a:r>
-              <a:rPr sz="2800" b="1">
-                <a:solidFill>
-                  <a:srgbClr val="E8793A"/>
-                </a:solidFill>
-                <a:latin typeface="Nunito Sans"/>
-              </a:rPr>
-              <a:t>• </a:t>
-            </a:r>
-            <a:r>
-              <a:rPr sz="2800" b="0">
-                <a:solidFill>
-                  <a:srgbClr val="1F2A44"/>
-                </a:solidFill>
-                <a:latin typeface="Nunito Sans"/>
-              </a:rPr>
-              <a:t>Aristóteles fue un filósofo griego, alumno de Platón</a:t>
+              <a:t> así; hay quien lo explica de otras formas</a:t>
             </a:r>
           </a:p>
         </p:txBody>
@@ -7026,7 +7468,7 @@
                 </a:solidFill>
                 <a:latin typeface="Nunito Sans"/>
               </a:rPr>
-              <a:t>BLOQUE 1 · TRES TIPOS DE AMISTAD</a:t>
+              <a:t>BLOQUE 1 · DOS PALABRAS DISTINTAS</a:t>
             </a:r>
           </a:p>
         </p:txBody>
@@ -7065,7 +7507,7 @@
                 </a:solidFill>
                 <a:latin typeface="Fredoka"/>
               </a:rPr>
-              <a:t>Los tres tipos de amistad (Aristóteles)</a:t>
+              <a:t>¿Sexo o género?</a:t>
             </a:r>
           </a:p>
         </p:txBody>
@@ -7089,9 +7531,8 @@
                 <a:tableStyleId>{5C22544A-7EE6-4342-B048-85BDC9FD1C3A}</a:tableStyleId>
               </a:tblPr>
               <a:tblGrid>
-                <a:gridCol w="3637333"/>
-                <a:gridCol w="3637333"/>
-                <a:gridCol w="3637334"/>
+                <a:gridCol w="5456000"/>
+                <a:gridCol w="5456000"/>
               </a:tblGrid>
               <a:tr h="600000">
                 <a:tc>
@@ -7106,7 +7547,7 @@
                           </a:solidFill>
                           <a:latin typeface="Fredoka"/>
                         </a:rPr>
-                        <a:t>Tipo</a:t>
+                        <a:t>Frase</a:t>
                       </a:r>
                     </a:p>
                   </a:txBody>
@@ -7128,29 +7569,7 @@
                           </a:solidFill>
                           <a:latin typeface="Fredoka"/>
                         </a:rPr>
-                        <a:t>Qué quiero del otro</a:t>
-                      </a:r>
-                    </a:p>
-                  </a:txBody>
-                  <a:tcPr>
-                    <a:solidFill>
-                      <a:srgbClr val="1F2A44"/>
-                    </a:solidFill>
-                  </a:tcPr>
-                </a:tc>
-                <a:tc>
-                  <a:txBody>
-                    <a:bodyPr/>
-                    <a:lstStyle/>
-                    <a:p>
-                      <a:r>
-                        <a:rPr sz="2000" b="1">
-                          <a:solidFill>
-                            <a:srgbClr val="FBF7EF"/>
-                          </a:solidFill>
-                          <a:latin typeface="Fredoka"/>
-                        </a:rPr>
-                        <a:t>¿Cuánto dura?</a:t>
+                        <a:t>¿De qué habla?</a:t>
                       </a:r>
                     </a:p>
                   </a:txBody>
@@ -7174,16 +7593,7 @@
                           </a:solidFill>
                           <a:latin typeface="Nunito Sans"/>
                         </a:rPr>
-                        <a:t>Por </a:t>
-                      </a:r>
-                      <a:r>
-                        <a:rPr sz="2000" b="1">
-                          <a:solidFill>
-                            <a:srgbClr val="1F2A44"/>
-                          </a:solidFill>
-                          <a:latin typeface="Nunito Sans"/>
-                        </a:rPr>
-                        <a:t>utilidad</a:t>
+                        <a:t>«Su voz cambió en la pubertad»</a:t>
                       </a:r>
                     </a:p>
                   </a:txBody>
@@ -7199,27 +7609,14 @@
                     <a:lstStyle/>
                     <a:p>
                       <a:r>
-                        <a:rPr sz="2000" b="0">
+                        <a:rPr sz="2000" b="1">
                           <a:solidFill>
                             <a:srgbClr val="1F2A44"/>
                           </a:solidFill>
                           <a:latin typeface="Nunito Sans"/>
                         </a:rPr>
-                        <a:t>Que me sirva: me ayuda, me presta, me conviene</a:t>
+                        <a:t>Sexo</a:t>
                       </a:r>
-                    </a:p>
-                  </a:txBody>
-                  <a:tcPr>
-                    <a:solidFill>
-                      <a:srgbClr val="FFFFFF"/>
-                    </a:solidFill>
-                  </a:tcPr>
-                </a:tc>
-                <a:tc>
-                  <a:txBody>
-                    <a:bodyPr/>
-                    <a:lstStyle/>
-                    <a:p>
                       <a:r>
                         <a:rPr sz="2000" b="0">
                           <a:solidFill>
@@ -7227,7 +7624,7 @@
                           </a:solidFill>
                           <a:latin typeface="Nunito Sans"/>
                         </a:rPr>
-                        <a:t>Se acaba cuando deja de servir</a:t>
+                        <a:t>: el cuerpo y las hormonas</a:t>
                       </a:r>
                     </a:p>
                   </a:txBody>
@@ -7251,16 +7648,7 @@
                           </a:solidFill>
                           <a:latin typeface="Nunito Sans"/>
                         </a:rPr>
-                        <a:t>Por </a:t>
-                      </a:r>
-                      <a:r>
-                        <a:rPr sz="2000" b="1">
-                          <a:solidFill>
-                            <a:srgbClr val="1F2A44"/>
-                          </a:solidFill>
-                          <a:latin typeface="Nunito Sans"/>
-                        </a:rPr>
-                        <a:t>placer</a:t>
+                        <a:t>«Las chicas tienen que ser discretas»</a:t>
                       </a:r>
                     </a:p>
                   </a:txBody>
@@ -7276,27 +7664,14 @@
                     <a:lstStyle/>
                     <a:p>
                       <a:r>
-                        <a:rPr sz="2000" b="0">
+                        <a:rPr sz="2000" b="1">
                           <a:solidFill>
                             <a:srgbClr val="1F2A44"/>
                           </a:solidFill>
                           <a:latin typeface="Nunito Sans"/>
                         </a:rPr>
-                        <a:t>Pasarlo bien: es divertido, compartimos aficiones</a:t>
+                        <a:t>Género</a:t>
                       </a:r>
-                    </a:p>
-                  </a:txBody>
-                  <a:tcPr>
-                    <a:solidFill>
-                      <a:srgbClr val="EAF0F7"/>
-                    </a:solidFill>
-                  </a:tcPr>
-                </a:tc>
-                <a:tc>
-                  <a:txBody>
-                    <a:bodyPr/>
-                    <a:lstStyle/>
-                    <a:p>
                       <a:r>
                         <a:rPr sz="2000" b="0">
                           <a:solidFill>
@@ -7304,7 +7679,7 @@
                           </a:solidFill>
                           <a:latin typeface="Nunito Sans"/>
                         </a:rPr>
-                        <a:t>Se acaba cuando deja de divertir</a:t>
+                        <a:t>: una expectativa social</a:t>
                       </a:r>
                     </a:p>
                   </a:txBody>
@@ -7328,25 +7703,7 @@
                           </a:solidFill>
                           <a:latin typeface="Nunito Sans"/>
                         </a:rPr>
-                        <a:t>Por </a:t>
-                      </a:r>
-                      <a:r>
-                        <a:rPr sz="2000" b="1">
-                          <a:solidFill>
-                            <a:srgbClr val="1F2A44"/>
-                          </a:solidFill>
-                          <a:latin typeface="Nunito Sans"/>
-                        </a:rPr>
-                        <a:t>virtud</a:t>
-                      </a:r>
-                      <a:r>
-                        <a:rPr sz="2000" b="0">
-                          <a:solidFill>
-                            <a:srgbClr val="1F2A44"/>
-                          </a:solidFill>
-                          <a:latin typeface="Nunito Sans"/>
-                        </a:rPr>
-                        <a:t> (por la persona misma)</a:t>
+                        <a:t>«Los hombres no friegan»</a:t>
                       </a:r>
                     </a:p>
                   </a:txBody>
@@ -7362,27 +7719,14 @@
                     <a:lstStyle/>
                     <a:p>
                       <a:r>
-                        <a:rPr sz="2000" b="0">
+                        <a:rPr sz="2000" b="1">
                           <a:solidFill>
                             <a:srgbClr val="1F2A44"/>
                           </a:solidFill>
                           <a:latin typeface="Nunito Sans"/>
                         </a:rPr>
-                        <a:t>A la persona: quiero su bien por ella misma</a:t>
+                        <a:t>Género</a:t>
                       </a:r>
-                    </a:p>
-                  </a:txBody>
-                  <a:tcPr>
-                    <a:solidFill>
-                      <a:srgbClr val="FFFFFF"/>
-                    </a:solidFill>
-                  </a:tcPr>
-                </a:tc>
-                <a:tc>
-                  <a:txBody>
-                    <a:bodyPr/>
-                    <a:lstStyle/>
-                    <a:p>
                       <a:r>
                         <a:rPr sz="2000" b="0">
                           <a:solidFill>
@@ -7390,7 +7734,7 @@
                           </a:solidFill>
                           <a:latin typeface="Nunito Sans"/>
                         </a:rPr>
-                        <a:t>Dura mucho, pero es rara</a:t>
+                        <a:t>: un rol que se ha enseñado</a:t>
                       </a:r>
                     </a:p>
                   </a:txBody>
@@ -7465,7 +7809,7 @@
                 </a:solidFill>
                 <a:latin typeface="Nunito Sans"/>
               </a:rPr>
-              <a:t>BLOQUE 1 · TRES TIPOS DE AMISTAD</a:t>
+              <a:t>BLOQUE 1 · DOS PALABRAS DISTINTAS</a:t>
             </a:r>
           </a:p>
         </p:txBody>
@@ -7504,7 +7848,7 @@
                 </a:solidFill>
                 <a:latin typeface="Fredoka"/>
               </a:rPr>
-              <a:t>Lo que añade Aristóteles</a:t>
+              <a:t>Los roles cambian con las épocas y los lugares</a:t>
             </a:r>
           </a:p>
         </p:txBody>
@@ -7552,7 +7896,7 @@
                 </a:solidFill>
                 <a:latin typeface="Nunito Sans"/>
               </a:rPr>
-              <a:t>Las amistades por utilidad y por placer </a:t>
+              <a:t>En el siglo XVII, los </a:t>
             </a:r>
             <a:r>
               <a:rPr sz="2800" b="1">
@@ -7561,7 +7905,7 @@
                 </a:solidFill>
                 <a:latin typeface="Nunito Sans"/>
               </a:rPr>
-              <a:t>no son falsas</a:t>
+              <a:t>tacones</a:t>
             </a:r>
             <a:r>
               <a:rPr sz="2800" b="0">
@@ -7570,7 +7914,7 @@
                 </a:solidFill>
                 <a:latin typeface="Nunito Sans"/>
               </a:rPr>
-              <a:t>: son más frágiles</a:t>
+              <a:t> eran moda de hombres nobles en Europa</a:t>
             </a:r>
           </a:p>
           <a:p>
@@ -7589,22 +7933,56 @@
               <a:t>• </a:t>
             </a:r>
             <a:r>
+              <a:rPr sz="2800" b="1">
+                <a:solidFill>
+                  <a:srgbClr val="1F2A44"/>
+                </a:solidFill>
+                <a:latin typeface="Nunito Sans"/>
+              </a:rPr>
+              <a:t>Rosa para niñas</a:t>
+            </a:r>
+            <a:r>
               <a:rPr sz="2800" b="0">
                 <a:solidFill>
                   <a:srgbClr val="1F2A44"/>
                 </a:solidFill>
                 <a:latin typeface="Nunito Sans"/>
               </a:rPr>
-              <a:t>Según él, los jóvenes suelen hacer amistades por </a:t>
-            </a:r>
+              <a:t> y azul para niños: se extendió en el siglo XX</a:t>
+            </a:r>
+          </a:p>
+          <a:p>
+            <a:pPr>
+              <a:spcAft>
+                <a:spcPts val="1260"/>
+              </a:spcAft>
+            </a:pPr>
             <a:r>
               <a:rPr sz="2800" b="1">
                 <a:solidFill>
+                  <a:srgbClr val="E8793A"/>
+                </a:solidFill>
+                <a:latin typeface="Nunito Sans"/>
+              </a:rPr>
+              <a:t>• </a:t>
+            </a:r>
+            <a:r>
+              <a:rPr sz="2800" b="0">
+                <a:solidFill>
                   <a:srgbClr val="1F2A44"/>
                 </a:solidFill>
                 <a:latin typeface="Nunito Sans"/>
               </a:rPr>
-              <a:t>placer</a:t>
+              <a:t>En Escocia, muchos hombres llevan </a:t>
+            </a:r>
+            <a:r>
+              <a:rPr sz="2800" b="1">
+                <a:solidFill>
+                  <a:srgbClr val="1F2A44"/>
+                </a:solidFill>
+                <a:latin typeface="Nunito Sans"/>
+              </a:rPr>
+              <a:t>falda</a:t>
             </a:r>
             <a:r>
               <a:rPr sz="2800" b="0">
@@ -7613,7 +7991,7 @@
                 </a:solidFill>
                 <a:latin typeface="Nunito Sans"/>
               </a:rPr>
-              <a:t>, y cambian a menudo</a:t>
+              <a:t> (el kilt) en las fiestas</a:t>
             </a:r>
           </a:p>
           <a:p>
@@ -7638,7 +8016,7 @@
                 </a:solidFill>
                 <a:latin typeface="Nunito Sans"/>
               </a:rPr>
-              <a:t>La amistad por </a:t>
+              <a:t>En España, hasta 1975, una mujer casada necesitaba </a:t>
             </a:r>
             <a:r>
               <a:rPr sz="2800" b="1">
@@ -7647,7 +8025,7 @@
                 </a:solidFill>
                 <a:latin typeface="Nunito Sans"/>
               </a:rPr>
-              <a:t>virtud</a:t>
+              <a:t>permiso del marido</a:t>
             </a:r>
             <a:r>
               <a:rPr sz="2800" b="0">
@@ -7656,50 +8034,7 @@
                 </a:solidFill>
                 <a:latin typeface="Nunito Sans"/>
               </a:rPr>
-              <a:t> también es útil y agradable, pero no depende de eso</a:t>
-            </a:r>
-          </a:p>
-          <a:p>
-            <a:pPr>
-              <a:spcAft>
-                <a:spcPts val="1260"/>
-              </a:spcAft>
-            </a:pPr>
-            <a:r>
-              <a:rPr sz="2800" b="1">
-                <a:solidFill>
-                  <a:srgbClr val="E8793A"/>
-                </a:solidFill>
-                <a:latin typeface="Nunito Sans"/>
-              </a:rPr>
-              <a:t>• </a:t>
-            </a:r>
-            <a:r>
-              <a:rPr sz="2800" b="0">
-                <a:solidFill>
-                  <a:srgbClr val="1F2A44"/>
-                </a:solidFill>
-                <a:latin typeface="Nunito Sans"/>
-              </a:rPr>
-              <a:t>Necesita </a:t>
-            </a:r>
-            <a:r>
-              <a:rPr sz="2800" b="1">
-                <a:solidFill>
-                  <a:srgbClr val="1F2A44"/>
-                </a:solidFill>
-                <a:latin typeface="Nunito Sans"/>
-              </a:rPr>
-              <a:t>tiempo</a:t>
-            </a:r>
-            <a:r>
-              <a:rPr sz="2800" b="0">
-                <a:solidFill>
-                  <a:srgbClr val="1F2A44"/>
-                </a:solidFill>
-                <a:latin typeface="Nunito Sans"/>
-              </a:rPr>
-              <a:t> y trato: no se hace en una semana</a:t>
+              <a:t> para trabajar</a:t>
             </a:r>
           </a:p>
         </p:txBody>
